--- a/docs/WelfareAssist_Pro_新人向けガイド.pptx
+++ b/docs/WelfareAssist_Pro_新人向けガイド.pptx
@@ -5500,7 +5500,7 @@
                 </a:solidFill>
                 <a:latin typeface="Meiryo UI"/>
               </a:rPr>
-              <a:t>新規・入院・退院・解約・変更の記録を全利用者横断で確認</a:t>
+              <a:t>新規・入院・退院・解約・デモ・変更の記録を全利用者横断で確認</a:t>
             </a:r>
           </a:p>
         </p:txBody>
@@ -5840,7 +5840,7 @@
                 </a:solidFill>
                 <a:latin typeface="Meiryo UI"/>
               </a:rPr>
-              <a:t>Googleスプレッドシートへの直接書き出しも可能</a:t>
+              <a:t>Googleスプレッドシートへ直接書き出し（追記モード・新規のみ末尾追加）</a:t>
             </a:r>
           </a:p>
         </p:txBody>
@@ -10195,8 +10195,8 @@
         </p:nvSpPr>
         <p:spPr>
           <a:xfrm>
-            <a:off x="365760" y="2423160"/>
-            <a:ext cx="5486400" cy="1005840"/>
+            <a:off x="365760" y="2103120"/>
+            <a:ext cx="5486400" cy="914400"/>
           </a:xfrm>
           <a:prstGeom prst="rect">
             <a:avLst/>
@@ -10240,7 +10240,7 @@
         </p:nvSpPr>
         <p:spPr>
           <a:xfrm>
-            <a:off x="548640" y="2496312"/>
+            <a:off x="548640" y="2167127"/>
             <a:ext cx="5120640" cy="411480"/>
           </a:xfrm>
           <a:prstGeom prst="rect">
@@ -10262,7 +10262,7 @@
                 </a:solidFill>
                 <a:latin typeface="Meiryo UI"/>
               </a:rPr>
-              <a:t>✦ 利用者管理</a:t>
+              <a:t>✦ 福祉用具集計</a:t>
             </a:r>
           </a:p>
         </p:txBody>
@@ -10275,8 +10275,8 @@
         </p:nvSpPr>
         <p:spPr>
           <a:xfrm>
-            <a:off x="548640" y="2898648"/>
-            <a:ext cx="5120640" cy="457200"/>
+            <a:off x="548640" y="2560320"/>
+            <a:ext cx="5120640" cy="411480"/>
           </a:xfrm>
           <a:prstGeom prst="rect">
             <a:avLst/>
@@ -10297,7 +10297,7 @@
                 </a:solidFill>
                 <a:latin typeface="Meiryo UI"/>
               </a:rPr>
-              <a:t>8,000件以上の利用者情報をGoogleスプレッドシート＋Kintoneと連携して管理</a:t>
+              <a:t>施設別・Status別・事業所別の3タブで福祉用具利用者を集計・一覧表示</a:t>
             </a:r>
           </a:p>
         </p:txBody>
@@ -10310,8 +10310,8 @@
         </p:nvSpPr>
         <p:spPr>
           <a:xfrm>
-            <a:off x="6263640" y="2423160"/>
-            <a:ext cx="5486400" cy="1005840"/>
+            <a:off x="6263640" y="2103120"/>
+            <a:ext cx="5486400" cy="914400"/>
           </a:xfrm>
           <a:prstGeom prst="rect">
             <a:avLst/>
@@ -10355,7 +10355,7 @@
         </p:nvSpPr>
         <p:spPr>
           <a:xfrm>
-            <a:off x="6446520" y="2496312"/>
+            <a:off x="6446520" y="2167127"/>
             <a:ext cx="5120640" cy="411480"/>
           </a:xfrm>
           <a:prstGeom prst="rect">
@@ -10377,7 +10377,7 @@
                 </a:solidFill>
                 <a:latin typeface="Meiryo UI"/>
               </a:rPr>
-              <a:t>✦ 月次売上処理</a:t>
+              <a:t>✦ 利用者管理</a:t>
             </a:r>
           </a:p>
         </p:txBody>
@@ -10390,8 +10390,8 @@
         </p:nvSpPr>
         <p:spPr>
           <a:xfrm>
-            <a:off x="6446520" y="2898648"/>
-            <a:ext cx="5120640" cy="457200"/>
+            <a:off x="6446520" y="2560320"/>
+            <a:ext cx="5120640" cy="411480"/>
           </a:xfrm>
           <a:prstGeom prst="rect">
             <a:avLst/>
@@ -10412,7 +10412,7 @@
                 </a:solidFill>
                 <a:latin typeface="Meiryo UI"/>
               </a:rPr>
-              <a:t>介護保険・自費レンタル・販売の売上を月次でCSV出力</a:t>
+              <a:t>8,000件以上の利用者情報をGoogleスプレッドシート＋Kintoneと連携して管理</a:t>
             </a:r>
           </a:p>
         </p:txBody>
@@ -10425,8 +10425,8 @@
         </p:nvSpPr>
         <p:spPr>
           <a:xfrm>
-            <a:off x="365760" y="3611880"/>
-            <a:ext cx="5486400" cy="1005840"/>
+            <a:off x="365760" y="3108960"/>
+            <a:ext cx="5486400" cy="914400"/>
           </a:xfrm>
           <a:prstGeom prst="rect">
             <a:avLst/>
@@ -10470,7 +10470,7 @@
         </p:nvSpPr>
         <p:spPr>
           <a:xfrm>
-            <a:off x="548640" y="3685032"/>
+            <a:off x="548640" y="3172968"/>
             <a:ext cx="5120640" cy="411480"/>
           </a:xfrm>
           <a:prstGeom prst="rect">
@@ -10492,7 +10492,7 @@
                 </a:solidFill>
                 <a:latin typeface="Meiryo UI"/>
               </a:rPr>
-              <a:t>✦ 売上・仕入突合</a:t>
+              <a:t>✦ 月次売上処理</a:t>
             </a:r>
           </a:p>
         </p:txBody>
@@ -10505,8 +10505,8 @@
         </p:nvSpPr>
         <p:spPr>
           <a:xfrm>
-            <a:off x="548640" y="4087368"/>
-            <a:ext cx="5120640" cy="457200"/>
+            <a:off x="548640" y="3566160"/>
+            <a:ext cx="5120640" cy="411480"/>
           </a:xfrm>
           <a:prstGeom prst="rect">
             <a:avLst/>
@@ -10527,7 +10527,7 @@
                 </a:solidFill>
                 <a:latin typeface="Meiryo UI"/>
               </a:rPr>
-              <a:t>卸会社6社の請求書をAI（OCR）で読み取り、粗利を自動計算</a:t>
+              <a:t>介護保険・自費レンタル・販売の売上を月次でCSV出力</a:t>
             </a:r>
           </a:p>
         </p:txBody>
@@ -10540,8 +10540,8 @@
         </p:nvSpPr>
         <p:spPr>
           <a:xfrm>
-            <a:off x="6263640" y="3611880"/>
-            <a:ext cx="5486400" cy="1005840"/>
+            <a:off x="6263640" y="3108960"/>
+            <a:ext cx="5486400" cy="914400"/>
           </a:xfrm>
           <a:prstGeom prst="rect">
             <a:avLst/>
@@ -10585,7 +10585,7 @@
         </p:nvSpPr>
         <p:spPr>
           <a:xfrm>
-            <a:off x="6446520" y="3685032"/>
+            <a:off x="6446520" y="3172968"/>
             <a:ext cx="5120640" cy="411480"/>
           </a:xfrm>
           <a:prstGeom prst="rect">
@@ -10607,7 +10607,7 @@
                 </a:solidFill>
                 <a:latin typeface="Meiryo UI"/>
               </a:rPr>
-              <a:t>✦ AI議事録生成</a:t>
+              <a:t>✦ 売上・仕入突合</a:t>
             </a:r>
           </a:p>
         </p:txBody>
@@ -10620,8 +10620,8 @@
         </p:nvSpPr>
         <p:spPr>
           <a:xfrm>
-            <a:off x="6446520" y="4087368"/>
-            <a:ext cx="5120640" cy="457200"/>
+            <a:off x="6446520" y="3566160"/>
+            <a:ext cx="5120640" cy="411480"/>
           </a:xfrm>
           <a:prstGeom prst="rect">
             <a:avLst/>
@@ -10642,7 +10642,7 @@
                 </a:solidFill>
                 <a:latin typeface="Meiryo UI"/>
               </a:rPr>
-              <a:t>Google Meetのメモから担当者会議・カンファレンス議事録を自動生成</a:t>
+              <a:t>卸会社6社の請求書をAI（OCR）で読み取り、粗利を自動計算</a:t>
             </a:r>
           </a:p>
         </p:txBody>
@@ -10655,8 +10655,8 @@
         </p:nvSpPr>
         <p:spPr>
           <a:xfrm>
-            <a:off x="365760" y="4800600"/>
-            <a:ext cx="5486400" cy="1005840"/>
+            <a:off x="365760" y="4114800"/>
+            <a:ext cx="5486400" cy="914400"/>
           </a:xfrm>
           <a:prstGeom prst="rect">
             <a:avLst/>
@@ -10700,7 +10700,7 @@
         </p:nvSpPr>
         <p:spPr>
           <a:xfrm>
-            <a:off x="548640" y="4873752"/>
+            <a:off x="548640" y="4178808"/>
             <a:ext cx="5120640" cy="411480"/>
           </a:xfrm>
           <a:prstGeom prst="rect">
@@ -10722,7 +10722,7 @@
                 </a:solidFill>
                 <a:latin typeface="Meiryo UI"/>
               </a:rPr>
-              <a:t>✦ レセプトチェック</a:t>
+              <a:t>✦ AI議事録生成</a:t>
             </a:r>
           </a:p>
         </p:txBody>
@@ -10735,8 +10735,8 @@
         </p:nvSpPr>
         <p:spPr>
           <a:xfrm>
-            <a:off x="548640" y="5276088"/>
-            <a:ext cx="5120640" cy="457200"/>
+            <a:off x="548640" y="4572000"/>
+            <a:ext cx="5120640" cy="411480"/>
           </a:xfrm>
           <a:prstGeom prst="rect">
             <a:avLst/>
@@ -10757,7 +10757,7 @@
                 </a:solidFill>
                 <a:latin typeface="Meiryo UI"/>
               </a:rPr>
-              <a:t>介護保険レンタルの請求前確認チェックリストをアプリ内で管理</a:t>
+              <a:t>Google Meetのメモから担当者会議・カンファレンス議事録を自動生成</a:t>
             </a:r>
           </a:p>
         </p:txBody>
@@ -10770,8 +10770,8 @@
         </p:nvSpPr>
         <p:spPr>
           <a:xfrm>
-            <a:off x="6263640" y="4800600"/>
-            <a:ext cx="5486400" cy="1005840"/>
+            <a:off x="6263640" y="4114800"/>
+            <a:ext cx="5486400" cy="914400"/>
           </a:xfrm>
           <a:prstGeom prst="rect">
             <a:avLst/>
@@ -10815,7 +10815,7 @@
         </p:nvSpPr>
         <p:spPr>
           <a:xfrm>
-            <a:off x="6446520" y="4873752"/>
+            <a:off x="6446520" y="4178808"/>
             <a:ext cx="5120640" cy="411480"/>
           </a:xfrm>
           <a:prstGeom prst="rect">
@@ -10837,6 +10837,121 @@
                 </a:solidFill>
                 <a:latin typeface="Meiryo UI"/>
               </a:rPr>
+              <a:t>✦ レセプトチェック</a:t>
+            </a:r>
+          </a:p>
+        </p:txBody>
+      </p:sp>
+      <p:sp>
+        <p:nvSpPr>
+          <p:cNvPr id="26" name="TextBox 25"/>
+          <p:cNvSpPr txBox="1"/>
+          <p:nvPr/>
+        </p:nvSpPr>
+        <p:spPr>
+          <a:xfrm>
+            <a:off x="6446520" y="4572000"/>
+            <a:ext cx="5120640" cy="411480"/>
+          </a:xfrm>
+          <a:prstGeom prst="rect">
+            <a:avLst/>
+          </a:prstGeom>
+          <a:noFill/>
+        </p:spPr>
+        <p:txBody>
+          <a:bodyPr wrap="square">
+            <a:spAutoFit/>
+          </a:bodyPr>
+          <a:lstStyle/>
+          <a:p>
+            <a:pPr algn="l"/>
+            <a:r>
+              <a:rPr sz="1200" b="0">
+                <a:solidFill>
+                  <a:srgbClr val="1A202C"/>
+                </a:solidFill>
+                <a:latin typeface="Meiryo UI"/>
+              </a:rPr>
+              <a:t>介護保険レンタルの請求前確認チェックリストをアプリ内で管理</a:t>
+            </a:r>
+          </a:p>
+        </p:txBody>
+      </p:sp>
+      <p:sp>
+        <p:nvSpPr>
+          <p:cNvPr id="27" name="Rectangle 26"/>
+          <p:cNvSpPr/>
+          <p:nvPr/>
+        </p:nvSpPr>
+        <p:spPr>
+          <a:xfrm>
+            <a:off x="365760" y="5120640"/>
+            <a:ext cx="5486400" cy="914400"/>
+          </a:xfrm>
+          <a:prstGeom prst="rect">
+            <a:avLst/>
+          </a:prstGeom>
+          <a:solidFill>
+            <a:srgbClr val="EFF6FF"/>
+          </a:solidFill>
+          <a:ln w="9525">
+            <a:solidFill>
+              <a:srgbClr val="BFDBFE"/>
+            </a:solidFill>
+          </a:ln>
+        </p:spPr>
+        <p:style>
+          <a:lnRef idx="1">
+            <a:schemeClr val="accent1"/>
+          </a:lnRef>
+          <a:fillRef idx="3">
+            <a:schemeClr val="accent1"/>
+          </a:fillRef>
+          <a:effectRef idx="2">
+            <a:schemeClr val="accent1"/>
+          </a:effectRef>
+          <a:fontRef idx="minor">
+            <a:schemeClr val="lt1"/>
+          </a:fontRef>
+        </p:style>
+        <p:txBody>
+          <a:bodyPr rtlCol="0" anchor="ctr"/>
+          <a:lstStyle/>
+          <a:p>
+            <a:pPr algn="ctr"/>
+          </a:p>
+        </p:txBody>
+      </p:sp>
+      <p:sp>
+        <p:nvSpPr>
+          <p:cNvPr id="28" name="TextBox 27"/>
+          <p:cNvSpPr txBox="1"/>
+          <p:nvPr/>
+        </p:nvSpPr>
+        <p:spPr>
+          <a:xfrm>
+            <a:off x="548640" y="5184648"/>
+            <a:ext cx="5120640" cy="411480"/>
+          </a:xfrm>
+          <a:prstGeom prst="rect">
+            <a:avLst/>
+          </a:prstGeom>
+          <a:noFill/>
+        </p:spPr>
+        <p:txBody>
+          <a:bodyPr wrap="square">
+            <a:spAutoFit/>
+          </a:bodyPr>
+          <a:lstStyle/>
+          <a:p>
+            <a:pPr algn="l"/>
+            <a:r>
+              <a:rPr sz="1500" b="1">
+                <a:solidFill>
+                  <a:srgbClr val="2B6CB0"/>
+                </a:solidFill>
+                <a:latin typeface="Meiryo UI"/>
+              </a:rPr>
               <a:t>✦ ベッド管理</a:t>
             </a:r>
           </a:p>
@@ -10844,14 +10959,14 @@
       </p:sp>
       <p:sp>
         <p:nvSpPr>
-          <p:cNvPr id="26" name="TextBox 25"/>
-          <p:cNvSpPr txBox="1"/>
-          <p:nvPr/>
-        </p:nvSpPr>
-        <p:spPr>
-          <a:xfrm>
-            <a:off x="6446520" y="5276088"/>
-            <a:ext cx="5120640" cy="457200"/>
+          <p:cNvPr id="29" name="TextBox 28"/>
+          <p:cNvSpPr txBox="1"/>
+          <p:nvPr/>
+        </p:nvSpPr>
+        <p:spPr>
+          <a:xfrm>
+            <a:off x="548640" y="5577840"/>
+            <a:ext cx="5120640" cy="411480"/>
           </a:xfrm>
           <a:prstGeom prst="rect">
             <a:avLst/>
@@ -12608,7 +12723,7 @@
                 </a:solidFill>
                 <a:latin typeface="Meiryo UI"/>
               </a:rPr>
-              <a:t>新規・入院・退院・解約などの変更を記録。卸会社への連絡状況も管理。</a:t>
+              <a:t>新規・入院・退院・解約・デモなどの変更を記録。デモ開始日・終了日も管理。</a:t>
             </a:r>
           </a:p>
         </p:txBody>
